--- a/dist/초3/사회·역사/공동체와교류/초3_사회·역사_공동체와교류_02_사람과물자의교류.pptx
+++ b/dist/초3/사회·역사/공동체와교류/초3_사회·역사_공동체와교류_02_사람과물자의교류.pptx
@@ -120,13 +120,13 @@
   <p:extLst>
     <p:ext uri="{521415D9-36F7-43E2-AB2F-B90AF26B5E84}">
       <p14:sectionLst xmlns:p14="http://schemas.microsoft.com/office/powerpoint/2010/main">
-        <p14:section name="도입" id="{7cb75291-2231-e47d-02d5-901e602984eb}">
+        <p14:section name="도입" id="{a72883c6-be72-7164-6c05-2d0f4bbeff48}">
           <p14:sldIdLst>
             <p14:sldId id="256"/>
             <p14:sldId id="257"/>
           </p14:sldIdLst>
         </p14:section>
-        <p14:section name="개념" id="{c3ea8f46-3259-f785-3488-41db9e5255bf}">
+        <p14:section name="개념" id="{a0fd4638-09b1-800c-c7be-a61de51a507a}">
           <p14:sldIdLst>
             <p14:sldId id="258"/>
             <p14:sldId id="259"/>
@@ -134,32 +134,32 @@
             <p14:sldId id="262"/>
           </p14:sldIdLst>
         </p14:section>
-        <p14:section name="연습" id="{924574e4-25d3-29ce-1c58-737c4eaa5818}">
+        <p14:section name="연습" id="{8278e55a-e6e3-67fb-beab-fd101949c61a}">
           <p14:sldIdLst>
             <p14:sldId id="260"/>
             <p14:sldId id="263"/>
             <p14:sldId id="264"/>
           </p14:sldIdLst>
         </p14:section>
-        <p14:section name="개념" id="{cbcd5024-41e2-a231-d9df-b5cacec545f2}">
+        <p14:section name="개념" id="{570b3346-38e0-b768-ee60-97ccebb43ee4}">
           <p14:sldIdLst/>
         </p14:section>
-        <p14:section name="연습" id="{1e1ce8d6-61ef-10ef-0920-9141c833e8b4}">
+        <p14:section name="연습" id="{3a8e4633-f5eb-d6f9-a094-e7f34228d903}">
           <p14:sldIdLst/>
         </p14:section>
-        <p14:section name="확인" id="{457d5440-ee14-886c-ca6d-b10107ce95ea}">
+        <p14:section name="확인" id="{1b2a2470-da49-0c7d-a913-ca3c19f0cee3}">
           <p14:sldIdLst>
             <p14:sldId id="265"/>
             <p14:sldId id="266"/>
             <p14:sldId id="267"/>
           </p14:sldIdLst>
         </p14:section>
-        <p14:section name="정리" id="{cce08bc4-f3a4-49e2-f195-5543f00e6d64}">
+        <p14:section name="정리" id="{2b2d9b16-2bc7-4b84-87b1-eba9cfc8a3dc}">
           <p14:sldIdLst>
             <p14:sldId id="268"/>
           </p14:sldIdLst>
         </p14:section>
-        <p14:section name="보충" id="{9b50d4dc-6e91-66a3-e667-df846e9b2a0c}">
+        <p14:section name="보충" id="{7052f153-649b-f43b-7107-9688f6a3579d}">
           <p14:sldIdLst>
             <p14:sldId id="269"/>
           </p14:sldIdLst>
